--- a/Alcopalet_Defensa.pptx
+++ b/Alcopalet_Defensa.pptx
@@ -160,7 +160,7 @@
                 <a:pPr>
                   <a:defRPr b="0" i="0" strike="noStrike" sz="1300" u="none">
                     <a:solidFill>
-                      <a:srgbClr val="2B2118"/>
+                      <a:srgbClr val="12294A"/>
                     </a:solidFill>
                     <a:latin typeface="Calibri"/>
                   </a:defRPr>
@@ -192,7 +192,7 @@
             <c:bubble3D val="0"/>
             <c:spPr>
               <a:solidFill>
-                <a:srgbClr val="2E6F40"/>
+                <a:srgbClr val="1E6B3A"/>
               </a:solidFill>
               <a:effectLst/>
             </c:spPr>
@@ -238,7 +238,7 @@
               <a:pPr>
                 <a:defRPr b="0" i="0" strike="noStrike" sz="1300" u="none">
                   <a:solidFill>
-                    <a:srgbClr val="2B2118"/>
+                    <a:srgbClr val="12294A"/>
                   </a:solidFill>
                   <a:latin typeface="Calibri"/>
                 </a:defRPr>
@@ -286,7 +286,7 @@
             <a:pPr>
               <a:defRPr sz="1300" b="0" i="0" u="none" strike="noStrike">
                 <a:solidFill>
-                  <a:srgbClr val="2B2118"/>
+                  <a:srgbClr val="12294A"/>
                 </a:solidFill>
                 <a:latin typeface="Calibri"/>
               </a:defRPr>
@@ -340,7 +340,7 @@
             <a:pPr>
               <a:defRPr sz="1000" b="0" i="0" u="none" strike="noStrike">
                 <a:solidFill>
-                  <a:srgbClr val="6B6259"/>
+                  <a:srgbClr val="5A6472"/>
                 </a:solidFill>
                 <a:latin typeface="Calibri"/>
               </a:defRPr>
@@ -2094,7 +2094,7 @@
     <p:bg>
       <p:bgPr>
         <a:solidFill>
-          <a:srgbClr val="2B2118"/>
+          <a:srgbClr val="12294A"/>
         </a:solidFill>
       </p:bgPr>
     </p:bg>
@@ -2139,7 +2139,7 @@
             <a:r>
               <a:rPr lang="en-US" sz="1400" b="1" spc="500" kern="0" dirty="0">
                 <a:solidFill>
-                  <a:srgbClr val="C87F2A"/>
+                  <a:srgbClr val="8FB3DE"/>
                 </a:solidFill>
                 <a:latin typeface="Calibri" pitchFamily="34" charset="0"/>
                 <a:ea typeface="Calibri" pitchFamily="34" charset="-122"/>
@@ -2217,7 +2217,7 @@
             <a:r>
               <a:rPr lang="en-US" sz="2600" i="1" dirty="0">
                 <a:solidFill>
-                  <a:srgbClr val="EFD9B8"/>
+                  <a:srgbClr val="D6E2F0"/>
                 </a:solidFill>
                 <a:latin typeface="Cambria" pitchFamily="34" charset="0"/>
                 <a:ea typeface="Cambria" pitchFamily="34" charset="-122"/>
@@ -2244,7 +2244,7 @@
             <a:avLst/>
           </a:prstGeom>
           <a:solidFill>
-            <a:srgbClr val="C87F2A"/>
+            <a:srgbClr val="8FB3DE"/>
           </a:solidFill>
           <a:ln/>
         </p:spPr>
@@ -2315,7 +2315,7 @@
             <a:r>
               <a:rPr lang="en-US" sz="1200" dirty="0">
                 <a:solidFill>
-                  <a:srgbClr val="A79E93"/>
+                  <a:srgbClr val="98A2B0"/>
                 </a:solidFill>
                 <a:latin typeface="Calibri" pitchFamily="34" charset="0"/>
                 <a:ea typeface="Calibri" pitchFamily="34" charset="-122"/>
@@ -2379,7 +2379,7 @@
             <a:r>
               <a:rPr lang="en-US" sz="3200" b="1" dirty="0">
                 <a:solidFill>
-                  <a:srgbClr val="2B2118"/>
+                  <a:srgbClr val="12294A"/>
                 </a:solidFill>
                 <a:latin typeface="Cambria" pitchFamily="34" charset="0"/>
                 <a:ea typeface="Cambria" pitchFamily="34" charset="-122"/>
@@ -2418,7 +2418,7 @@
             <a:r>
               <a:rPr lang="en-US" sz="1400" dirty="0">
                 <a:solidFill>
-                  <a:srgbClr val="6B6259"/>
+                  <a:srgbClr val="5A6472"/>
                 </a:solidFill>
                 <a:latin typeface="Calibri" pitchFamily="34" charset="0"/>
                 <a:ea typeface="Calibri" pitchFamily="34" charset="-122"/>
@@ -2443,15 +2443,15 @@
           </a:xfrm>
           <a:prstGeom prst="roundRect">
             <a:avLst>
-              <a:gd name="adj" fmla="val 2553"/>
+              <a:gd name="adj" fmla="val 1277"/>
             </a:avLst>
           </a:prstGeom>
           <a:solidFill>
-            <a:srgbClr val="F7F5F2"/>
+            <a:srgbClr val="F4F6F9"/>
           </a:solidFill>
           <a:ln w="12700">
             <a:solidFill>
-              <a:srgbClr val="F7F5F2"/>
+              <a:srgbClr val="F4F6F9"/>
             </a:solidFill>
             <a:prstDash val="solid"/>
           </a:ln>
@@ -2484,7 +2484,7 @@
             <a:r>
               <a:rPr lang="en-US" sz="3200" b="1" dirty="0">
                 <a:solidFill>
-                  <a:srgbClr val="C87F2A"/>
+                  <a:srgbClr val="3E6CA3"/>
                 </a:solidFill>
                 <a:latin typeface="Cambria" pitchFamily="34" charset="0"/>
                 <a:ea typeface="Cambria" pitchFamily="34" charset="-122"/>
@@ -2523,7 +2523,7 @@
             <a:r>
               <a:rPr lang="en-US" sz="1400" b="1" dirty="0">
                 <a:solidFill>
-                  <a:srgbClr val="2B2118"/>
+                  <a:srgbClr val="12294A"/>
                 </a:solidFill>
                 <a:latin typeface="Calibri" pitchFamily="34" charset="0"/>
                 <a:ea typeface="Calibri" pitchFamily="34" charset="-122"/>
@@ -2565,7 +2565,7 @@
             <a:r>
               <a:rPr lang="en-US" sz="1200" dirty="0">
                 <a:solidFill>
-                  <a:srgbClr val="6B6259"/>
+                  <a:srgbClr val="5A6472"/>
                 </a:solidFill>
                 <a:latin typeface="Calibri" pitchFamily="34" charset="0"/>
                 <a:ea typeface="Calibri" pitchFamily="34" charset="-122"/>
@@ -2585,7 +2585,7 @@
             <a:r>
               <a:rPr lang="en-US" sz="1200" dirty="0">
                 <a:solidFill>
-                  <a:srgbClr val="6B6259"/>
+                  <a:srgbClr val="5A6472"/>
                 </a:solidFill>
                 <a:latin typeface="Calibri" pitchFamily="34" charset="0"/>
                 <a:ea typeface="Calibri" pitchFamily="34" charset="-122"/>
@@ -2610,15 +2610,15 @@
           </a:xfrm>
           <a:prstGeom prst="roundRect">
             <a:avLst>
-              <a:gd name="adj" fmla="val 2553"/>
+              <a:gd name="adj" fmla="val 1277"/>
             </a:avLst>
           </a:prstGeom>
           <a:solidFill>
-            <a:srgbClr val="F7F5F2"/>
+            <a:srgbClr val="F4F6F9"/>
           </a:solidFill>
           <a:ln w="12700">
             <a:solidFill>
-              <a:srgbClr val="F7F5F2"/>
+              <a:srgbClr val="F4F6F9"/>
             </a:solidFill>
             <a:prstDash val="solid"/>
           </a:ln>
@@ -2651,7 +2651,7 @@
             <a:r>
               <a:rPr lang="en-US" sz="3200" b="1" dirty="0">
                 <a:solidFill>
-                  <a:srgbClr val="C87F2A"/>
+                  <a:srgbClr val="3E6CA3"/>
                 </a:solidFill>
                 <a:latin typeface="Cambria" pitchFamily="34" charset="0"/>
                 <a:ea typeface="Cambria" pitchFamily="34" charset="-122"/>
@@ -2690,7 +2690,7 @@
             <a:r>
               <a:rPr lang="en-US" sz="1400" b="1" dirty="0">
                 <a:solidFill>
-                  <a:srgbClr val="2B2118"/>
+                  <a:srgbClr val="12294A"/>
                 </a:solidFill>
                 <a:latin typeface="Calibri" pitchFamily="34" charset="0"/>
                 <a:ea typeface="Calibri" pitchFamily="34" charset="-122"/>
@@ -2732,7 +2732,7 @@
             <a:r>
               <a:rPr lang="en-US" sz="1200" dirty="0">
                 <a:solidFill>
-                  <a:srgbClr val="6B6259"/>
+                  <a:srgbClr val="5A6472"/>
                 </a:solidFill>
                 <a:latin typeface="Calibri" pitchFamily="34" charset="0"/>
                 <a:ea typeface="Calibri" pitchFamily="34" charset="-122"/>
@@ -2752,7 +2752,7 @@
             <a:r>
               <a:rPr lang="en-US" sz="1200" dirty="0">
                 <a:solidFill>
-                  <a:srgbClr val="6B6259"/>
+                  <a:srgbClr val="5A6472"/>
                 </a:solidFill>
                 <a:latin typeface="Calibri" pitchFamily="34" charset="0"/>
                 <a:ea typeface="Calibri" pitchFamily="34" charset="-122"/>
@@ -2777,15 +2777,15 @@
           </a:xfrm>
           <a:prstGeom prst="roundRect">
             <a:avLst>
-              <a:gd name="adj" fmla="val 2553"/>
+              <a:gd name="adj" fmla="val 1277"/>
             </a:avLst>
           </a:prstGeom>
           <a:solidFill>
-            <a:srgbClr val="F7F5F2"/>
+            <a:srgbClr val="F4F6F9"/>
           </a:solidFill>
           <a:ln w="12700">
             <a:solidFill>
-              <a:srgbClr val="F7F5F2"/>
+              <a:srgbClr val="F4F6F9"/>
             </a:solidFill>
             <a:prstDash val="solid"/>
           </a:ln>
@@ -2818,7 +2818,7 @@
             <a:r>
               <a:rPr lang="en-US" sz="3200" b="1" dirty="0">
                 <a:solidFill>
-                  <a:srgbClr val="C87F2A"/>
+                  <a:srgbClr val="3E6CA3"/>
                 </a:solidFill>
                 <a:latin typeface="Cambria" pitchFamily="34" charset="0"/>
                 <a:ea typeface="Cambria" pitchFamily="34" charset="-122"/>
@@ -2857,7 +2857,7 @@
             <a:r>
               <a:rPr lang="en-US" sz="1400" b="1" dirty="0">
                 <a:solidFill>
-                  <a:srgbClr val="2B2118"/>
+                  <a:srgbClr val="12294A"/>
                 </a:solidFill>
                 <a:latin typeface="Calibri" pitchFamily="34" charset="0"/>
                 <a:ea typeface="Calibri" pitchFamily="34" charset="-122"/>
@@ -2899,7 +2899,7 @@
             <a:r>
               <a:rPr lang="en-US" sz="1200" dirty="0">
                 <a:solidFill>
-                  <a:srgbClr val="6B6259"/>
+                  <a:srgbClr val="5A6472"/>
                 </a:solidFill>
                 <a:latin typeface="Calibri" pitchFamily="34" charset="0"/>
                 <a:ea typeface="Calibri" pitchFamily="34" charset="-122"/>
@@ -2919,7 +2919,7 @@
             <a:r>
               <a:rPr lang="en-US" sz="1200" dirty="0">
                 <a:solidFill>
-                  <a:srgbClr val="6B6259"/>
+                  <a:srgbClr val="5A6472"/>
                 </a:solidFill>
                 <a:latin typeface="Calibri" pitchFamily="34" charset="0"/>
                 <a:ea typeface="Calibri" pitchFamily="34" charset="-122"/>
@@ -2944,15 +2944,15 @@
           </a:xfrm>
           <a:prstGeom prst="roundRect">
             <a:avLst>
-              <a:gd name="adj" fmla="val 4800"/>
+              <a:gd name="adj" fmla="val 2400"/>
             </a:avLst>
           </a:prstGeom>
           <a:solidFill>
-            <a:srgbClr val="2B2118"/>
+            <a:srgbClr val="12294A"/>
           </a:solidFill>
           <a:ln w="12700">
             <a:solidFill>
-              <a:srgbClr val="2B2118"/>
+              <a:srgbClr val="12294A"/>
             </a:solidFill>
             <a:prstDash val="solid"/>
           </a:ln>
@@ -3024,7 +3024,7 @@
             <a:r>
               <a:rPr lang="en-US" sz="1300" dirty="0">
                 <a:solidFill>
-                  <a:srgbClr val="EFD9B8"/>
+                  <a:srgbClr val="D6E2F0"/>
                 </a:solidFill>
                 <a:latin typeface="Calibri" pitchFamily="34" charset="0"/>
                 <a:ea typeface="Calibri" pitchFamily="34" charset="-122"/>
@@ -3063,7 +3063,7 @@
             <a:r>
               <a:rPr lang="en-US" sz="2600" strike="sngStrike" dirty="0">
                 <a:solidFill>
-                  <a:srgbClr val="8A8079"/>
+                  <a:srgbClr val="7C8899"/>
                 </a:solidFill>
                 <a:latin typeface="Cambria" pitchFamily="34" charset="0"/>
                 <a:ea typeface="Cambria" pitchFamily="34" charset="-122"/>
@@ -3102,7 +3102,7 @@
             <a:r>
               <a:rPr lang="en-US" sz="2000" dirty="0">
                 <a:solidFill>
-                  <a:srgbClr val="C87F2A"/>
+                  <a:srgbClr val="8FB3DE"/>
                 </a:solidFill>
                 <a:latin typeface="Calibri" pitchFamily="34" charset="0"/>
                 <a:ea typeface="Calibri" pitchFamily="34" charset="-122"/>
@@ -3180,7 +3180,7 @@
             <a:r>
               <a:rPr lang="en-US" sz="900" dirty="0">
                 <a:solidFill>
-                  <a:srgbClr val="A79E93"/>
+                  <a:srgbClr val="98A2B0"/>
                 </a:solidFill>
                 <a:latin typeface="Calibri" pitchFamily="34" charset="0"/>
                 <a:ea typeface="Calibri" pitchFamily="34" charset="-122"/>
@@ -3219,7 +3219,7 @@
             <a:r>
               <a:rPr lang="en-US" sz="900" dirty="0">
                 <a:solidFill>
-                  <a:srgbClr val="A79E93"/>
+                  <a:srgbClr val="98A2B0"/>
                 </a:solidFill>
                 <a:latin typeface="Calibri" pitchFamily="34" charset="0"/>
                 <a:ea typeface="Calibri" pitchFamily="34" charset="-122"/>
@@ -3283,7 +3283,7 @@
             <a:r>
               <a:rPr lang="en-US" sz="3200" b="1" dirty="0">
                 <a:solidFill>
-                  <a:srgbClr val="2B2118"/>
+                  <a:srgbClr val="12294A"/>
                 </a:solidFill>
                 <a:latin typeface="Cambria" pitchFamily="34" charset="0"/>
                 <a:ea typeface="Cambria" pitchFamily="34" charset="-122"/>
@@ -3322,7 +3322,7 @@
             <a:r>
               <a:rPr lang="en-US" sz="1400" dirty="0">
                 <a:solidFill>
-                  <a:srgbClr val="6B6259"/>
+                  <a:srgbClr val="5A6472"/>
                 </a:solidFill>
                 <a:latin typeface="Calibri" pitchFamily="34" charset="0"/>
                 <a:ea typeface="Calibri" pitchFamily="34" charset="-122"/>
@@ -3349,7 +3349,7 @@
             <a:avLst/>
           </a:prstGeom>
           <a:solidFill>
-            <a:srgbClr val="C87F2A"/>
+            <a:srgbClr val="3E6CA3"/>
           </a:solidFill>
           <a:ln/>
         </p:spPr>
@@ -3410,7 +3410,7 @@
           <a:noFill/>
           <a:ln w="25400">
             <a:solidFill>
-              <a:srgbClr val="EFD9B8"/>
+              <a:srgbClr val="D6E2F0"/>
             </a:solidFill>
             <a:prstDash val="solid"/>
           </a:ln>
@@ -3443,7 +3443,7 @@
             <a:r>
               <a:rPr lang="en-US" sz="1700" b="1" dirty="0">
                 <a:solidFill>
-                  <a:srgbClr val="2B2118"/>
+                  <a:srgbClr val="12294A"/>
                 </a:solidFill>
                 <a:latin typeface="Cambria" pitchFamily="34" charset="0"/>
                 <a:ea typeface="Cambria" pitchFamily="34" charset="-122"/>
@@ -3482,7 +3482,7 @@
             <a:r>
               <a:rPr lang="en-US" sz="1250" dirty="0">
                 <a:solidFill>
-                  <a:srgbClr val="6B6259"/>
+                  <a:srgbClr val="5A6472"/>
                 </a:solidFill>
                 <a:latin typeface="Calibri" pitchFamily="34" charset="0"/>
                 <a:ea typeface="Calibri" pitchFamily="34" charset="-122"/>
@@ -3509,7 +3509,7 @@
             <a:avLst/>
           </a:prstGeom>
           <a:solidFill>
-            <a:srgbClr val="C87F2A"/>
+            <a:srgbClr val="3E6CA3"/>
           </a:solidFill>
           <a:ln/>
         </p:spPr>
@@ -3570,7 +3570,7 @@
           <a:noFill/>
           <a:ln w="25400">
             <a:solidFill>
-              <a:srgbClr val="EFD9B8"/>
+              <a:srgbClr val="D6E2F0"/>
             </a:solidFill>
             <a:prstDash val="solid"/>
           </a:ln>
@@ -3603,7 +3603,7 @@
             <a:r>
               <a:rPr lang="en-US" sz="1700" b="1" dirty="0">
                 <a:solidFill>
-                  <a:srgbClr val="2B2118"/>
+                  <a:srgbClr val="12294A"/>
                 </a:solidFill>
                 <a:latin typeface="Cambria" pitchFamily="34" charset="0"/>
                 <a:ea typeface="Cambria" pitchFamily="34" charset="-122"/>
@@ -3642,7 +3642,7 @@
             <a:r>
               <a:rPr lang="en-US" sz="1250" dirty="0">
                 <a:solidFill>
-                  <a:srgbClr val="6B6259"/>
+                  <a:srgbClr val="5A6472"/>
                 </a:solidFill>
                 <a:latin typeface="Calibri" pitchFamily="34" charset="0"/>
                 <a:ea typeface="Calibri" pitchFamily="34" charset="-122"/>
@@ -3669,7 +3669,7 @@
             <a:avLst/>
           </a:prstGeom>
           <a:solidFill>
-            <a:srgbClr val="C87F2A"/>
+            <a:srgbClr val="3E6CA3"/>
           </a:solidFill>
           <a:ln/>
         </p:spPr>
@@ -3730,7 +3730,7 @@
           <a:noFill/>
           <a:ln w="25400">
             <a:solidFill>
-              <a:srgbClr val="EFD9B8"/>
+              <a:srgbClr val="D6E2F0"/>
             </a:solidFill>
             <a:prstDash val="solid"/>
           </a:ln>
@@ -3763,7 +3763,7 @@
             <a:r>
               <a:rPr lang="en-US" sz="1700" b="1" dirty="0">
                 <a:solidFill>
-                  <a:srgbClr val="2B2118"/>
+                  <a:srgbClr val="12294A"/>
                 </a:solidFill>
                 <a:latin typeface="Cambria" pitchFamily="34" charset="0"/>
                 <a:ea typeface="Cambria" pitchFamily="34" charset="-122"/>
@@ -3802,7 +3802,7 @@
             <a:r>
               <a:rPr lang="en-US" sz="1250" dirty="0">
                 <a:solidFill>
-                  <a:srgbClr val="6B6259"/>
+                  <a:srgbClr val="5A6472"/>
                 </a:solidFill>
                 <a:latin typeface="Calibri" pitchFamily="34" charset="0"/>
                 <a:ea typeface="Calibri" pitchFamily="34" charset="-122"/>
@@ -3829,7 +3829,7 @@
             <a:avLst/>
           </a:prstGeom>
           <a:solidFill>
-            <a:srgbClr val="C87F2A"/>
+            <a:srgbClr val="3E6CA3"/>
           </a:solidFill>
           <a:ln/>
         </p:spPr>
@@ -3890,7 +3890,7 @@
           <a:noFill/>
           <a:ln w="25400">
             <a:solidFill>
-              <a:srgbClr val="EFD9B8"/>
+              <a:srgbClr val="D6E2F0"/>
             </a:solidFill>
             <a:prstDash val="solid"/>
           </a:ln>
@@ -3923,7 +3923,7 @@
             <a:r>
               <a:rPr lang="en-US" sz="1700" b="1" dirty="0">
                 <a:solidFill>
-                  <a:srgbClr val="2B2118"/>
+                  <a:srgbClr val="12294A"/>
                 </a:solidFill>
                 <a:latin typeface="Cambria" pitchFamily="34" charset="0"/>
                 <a:ea typeface="Cambria" pitchFamily="34" charset="-122"/>
@@ -3962,7 +3962,7 @@
             <a:r>
               <a:rPr lang="en-US" sz="1250" dirty="0">
                 <a:solidFill>
-                  <a:srgbClr val="6B6259"/>
+                  <a:srgbClr val="5A6472"/>
                 </a:solidFill>
                 <a:latin typeface="Calibri" pitchFamily="34" charset="0"/>
                 <a:ea typeface="Calibri" pitchFamily="34" charset="-122"/>
@@ -3989,7 +3989,7 @@
             <a:avLst/>
           </a:prstGeom>
           <a:solidFill>
-            <a:srgbClr val="C87F2A"/>
+            <a:srgbClr val="3E6CA3"/>
           </a:solidFill>
           <a:ln/>
         </p:spPr>
@@ -4060,7 +4060,7 @@
             <a:r>
               <a:rPr lang="en-US" sz="1700" b="1" dirty="0">
                 <a:solidFill>
-                  <a:srgbClr val="2B2118"/>
+                  <a:srgbClr val="12294A"/>
                 </a:solidFill>
                 <a:latin typeface="Cambria" pitchFamily="34" charset="0"/>
                 <a:ea typeface="Cambria" pitchFamily="34" charset="-122"/>
@@ -4099,7 +4099,7 @@
             <a:r>
               <a:rPr lang="en-US" sz="1250" dirty="0">
                 <a:solidFill>
-                  <a:srgbClr val="6B6259"/>
+                  <a:srgbClr val="5A6472"/>
                 </a:solidFill>
                 <a:latin typeface="Calibri" pitchFamily="34" charset="0"/>
                 <a:ea typeface="Calibri" pitchFamily="34" charset="-122"/>
@@ -4138,7 +4138,7 @@
             <a:r>
               <a:rPr lang="en-US" sz="900" dirty="0">
                 <a:solidFill>
-                  <a:srgbClr val="A79E93"/>
+                  <a:srgbClr val="98A2B0"/>
                 </a:solidFill>
                 <a:latin typeface="Calibri" pitchFamily="34" charset="0"/>
                 <a:ea typeface="Calibri" pitchFamily="34" charset="-122"/>
@@ -4177,7 +4177,7 @@
             <a:r>
               <a:rPr lang="en-US" sz="900" dirty="0">
                 <a:solidFill>
-                  <a:srgbClr val="A79E93"/>
+                  <a:srgbClr val="98A2B0"/>
                 </a:solidFill>
                 <a:latin typeface="Calibri" pitchFamily="34" charset="0"/>
                 <a:ea typeface="Calibri" pitchFamily="34" charset="-122"/>
@@ -4203,7 +4203,7 @@
     <p:bg>
       <p:bgPr>
         <a:solidFill>
-          <a:srgbClr val="2B2118"/>
+          <a:srgbClr val="12294A"/>
         </a:solidFill>
       </p:bgPr>
     </p:bg>
@@ -4248,7 +4248,7 @@
             <a:r>
               <a:rPr lang="en-US" sz="1300" b="1" spc="500" kern="0" dirty="0">
                 <a:solidFill>
-                  <a:srgbClr val="C87F2A"/>
+                  <a:srgbClr val="8FB3DE"/>
                 </a:solidFill>
                 <a:latin typeface="Calibri" pitchFamily="34" charset="0"/>
                 <a:ea typeface="Calibri" pitchFamily="34" charset="-122"/>
@@ -4329,7 +4329,7 @@
             <a:r>
               <a:rPr lang="en-US" sz="1500" dirty="0">
                 <a:solidFill>
-                  <a:srgbClr val="EFD9B8"/>
+                  <a:srgbClr val="D6E2F0"/>
                 </a:solidFill>
                 <a:latin typeface="Calibri" pitchFamily="34" charset="0"/>
                 <a:ea typeface="Calibri" pitchFamily="34" charset="-122"/>
@@ -4356,7 +4356,7 @@
             <a:avLst/>
           </a:prstGeom>
           <a:solidFill>
-            <a:srgbClr val="C87F2A"/>
+            <a:srgbClr val="8FB3DE"/>
           </a:solidFill>
           <a:ln/>
         </p:spPr>
@@ -4427,7 +4427,7 @@
             <a:r>
               <a:rPr lang="en-US" sz="1400" dirty="0">
                 <a:solidFill>
-                  <a:srgbClr val="EFD9B8"/>
+                  <a:srgbClr val="D6E2F0"/>
                 </a:solidFill>
                 <a:latin typeface="Calibri" pitchFamily="34" charset="0"/>
                 <a:ea typeface="Calibri" pitchFamily="34" charset="-122"/>
@@ -4454,7 +4454,7 @@
             <a:avLst/>
           </a:prstGeom>
           <a:solidFill>
-            <a:srgbClr val="C87F2A"/>
+            <a:srgbClr val="8FB3DE"/>
           </a:solidFill>
           <a:ln/>
         </p:spPr>
@@ -4525,7 +4525,7 @@
             <a:r>
               <a:rPr lang="en-US" sz="1400" dirty="0">
                 <a:solidFill>
-                  <a:srgbClr val="EFD9B8"/>
+                  <a:srgbClr val="D6E2F0"/>
                 </a:solidFill>
                 <a:latin typeface="Calibri" pitchFamily="34" charset="0"/>
                 <a:ea typeface="Calibri" pitchFamily="34" charset="-122"/>
@@ -4552,7 +4552,7 @@
             <a:avLst/>
           </a:prstGeom>
           <a:solidFill>
-            <a:srgbClr val="C87F2A"/>
+            <a:srgbClr val="8FB3DE"/>
           </a:solidFill>
           <a:ln/>
         </p:spPr>
@@ -4623,7 +4623,7 @@
             <a:r>
               <a:rPr lang="en-US" sz="1400" dirty="0">
                 <a:solidFill>
-                  <a:srgbClr val="EFD9B8"/>
+                  <a:srgbClr val="D6E2F0"/>
                 </a:solidFill>
                 <a:latin typeface="Calibri" pitchFamily="34" charset="0"/>
                 <a:ea typeface="Calibri" pitchFamily="34" charset="-122"/>
@@ -4662,7 +4662,7 @@
             <a:r>
               <a:rPr lang="en-US" sz="1200" dirty="0">
                 <a:solidFill>
-                  <a:srgbClr val="8A8079"/>
+                  <a:srgbClr val="7C8899"/>
                 </a:solidFill>
                 <a:latin typeface="Calibri" pitchFamily="34" charset="0"/>
                 <a:ea typeface="Calibri" pitchFamily="34" charset="-122"/>
@@ -4726,7 +4726,7 @@
             <a:r>
               <a:rPr lang="en-US" sz="3200" b="1" dirty="0">
                 <a:solidFill>
-                  <a:srgbClr val="2B2118"/>
+                  <a:srgbClr val="12294A"/>
                 </a:solidFill>
                 <a:latin typeface="Cambria" pitchFamily="34" charset="0"/>
                 <a:ea typeface="Cambria" pitchFamily="34" charset="-122"/>
@@ -4765,7 +4765,7 @@
             <a:r>
               <a:rPr lang="en-US" sz="1400" dirty="0">
                 <a:solidFill>
-                  <a:srgbClr val="6B6259"/>
+                  <a:srgbClr val="5A6472"/>
                 </a:solidFill>
                 <a:latin typeface="Calibri" pitchFamily="34" charset="0"/>
                 <a:ea typeface="Calibri" pitchFamily="34" charset="-122"/>
@@ -4790,15 +4790,15 @@
           </a:xfrm>
           <a:prstGeom prst="roundRect">
             <a:avLst>
-              <a:gd name="adj" fmla="val 1829"/>
+              <a:gd name="adj" fmla="val 915"/>
             </a:avLst>
           </a:prstGeom>
           <a:solidFill>
-            <a:srgbClr val="F7F5F2"/>
+            <a:srgbClr val="F4F6F9"/>
           </a:solidFill>
           <a:ln w="12700">
             <a:solidFill>
-              <a:srgbClr val="F7F5F2"/>
+              <a:srgbClr val="F4F6F9"/>
             </a:solidFill>
             <a:prstDash val="solid"/>
           </a:ln>
@@ -4819,7 +4819,7 @@
             <a:avLst/>
           </a:prstGeom>
           <a:solidFill>
-            <a:srgbClr val="C87F2A"/>
+            <a:srgbClr val="3E6CA3"/>
           </a:solidFill>
           <a:ln/>
         </p:spPr>
@@ -4890,7 +4890,7 @@
             <a:r>
               <a:rPr lang="en-US" sz="1800" b="1" dirty="0">
                 <a:solidFill>
-                  <a:srgbClr val="2B2118"/>
+                  <a:srgbClr val="12294A"/>
                 </a:solidFill>
                 <a:latin typeface="Cambria" pitchFamily="34" charset="0"/>
                 <a:ea typeface="Cambria" pitchFamily="34" charset="-122"/>
@@ -4932,7 +4932,7 @@
             <a:r>
               <a:rPr lang="en-US" sz="1300" dirty="0">
                 <a:solidFill>
-                  <a:srgbClr val="6B6259"/>
+                  <a:srgbClr val="5A6472"/>
                 </a:solidFill>
                 <a:latin typeface="Calibri" pitchFamily="34" charset="0"/>
                 <a:ea typeface="Calibri" pitchFamily="34" charset="-122"/>
@@ -4952,7 +4952,7 @@
             <a:r>
               <a:rPr lang="en-US" sz="1300" dirty="0">
                 <a:solidFill>
-                  <a:srgbClr val="6B6259"/>
+                  <a:srgbClr val="5A6472"/>
                 </a:solidFill>
                 <a:latin typeface="Calibri" pitchFamily="34" charset="0"/>
                 <a:ea typeface="Calibri" pitchFamily="34" charset="-122"/>
@@ -4991,7 +4991,7 @@
             <a:r>
               <a:rPr lang="en-US" sz="1100" b="1" spc="100" kern="0" dirty="0">
                 <a:solidFill>
-                  <a:srgbClr val="C87F2A"/>
+                  <a:srgbClr val="3E6CA3"/>
                 </a:solidFill>
                 <a:latin typeface="Calibri" pitchFamily="34" charset="0"/>
                 <a:ea typeface="Calibri" pitchFamily="34" charset="-122"/>
@@ -5016,15 +5016,15 @@
           </a:xfrm>
           <a:prstGeom prst="roundRect">
             <a:avLst>
-              <a:gd name="adj" fmla="val 1829"/>
+              <a:gd name="adj" fmla="val 915"/>
             </a:avLst>
           </a:prstGeom>
           <a:solidFill>
-            <a:srgbClr val="F7F5F2"/>
+            <a:srgbClr val="F4F6F9"/>
           </a:solidFill>
           <a:ln w="12700">
             <a:solidFill>
-              <a:srgbClr val="F7F5F2"/>
+              <a:srgbClr val="F4F6F9"/>
             </a:solidFill>
             <a:prstDash val="solid"/>
           </a:ln>
@@ -5045,7 +5045,7 @@
             <a:avLst/>
           </a:prstGeom>
           <a:solidFill>
-            <a:srgbClr val="C87F2A"/>
+            <a:srgbClr val="3E6CA3"/>
           </a:solidFill>
           <a:ln/>
         </p:spPr>
@@ -5116,7 +5116,7 @@
             <a:r>
               <a:rPr lang="en-US" sz="1800" b="1" dirty="0">
                 <a:solidFill>
-                  <a:srgbClr val="2B2118"/>
+                  <a:srgbClr val="12294A"/>
                 </a:solidFill>
                 <a:latin typeface="Cambria" pitchFamily="34" charset="0"/>
                 <a:ea typeface="Cambria" pitchFamily="34" charset="-122"/>
@@ -5158,7 +5158,7 @@
             <a:r>
               <a:rPr lang="en-US" sz="1300" dirty="0">
                 <a:solidFill>
-                  <a:srgbClr val="6B6259"/>
+                  <a:srgbClr val="5A6472"/>
                 </a:solidFill>
                 <a:latin typeface="Calibri" pitchFamily="34" charset="0"/>
                 <a:ea typeface="Calibri" pitchFamily="34" charset="-122"/>
@@ -5178,7 +5178,7 @@
             <a:r>
               <a:rPr lang="en-US" sz="1300" dirty="0">
                 <a:solidFill>
-                  <a:srgbClr val="6B6259"/>
+                  <a:srgbClr val="5A6472"/>
                 </a:solidFill>
                 <a:latin typeface="Calibri" pitchFamily="34" charset="0"/>
                 <a:ea typeface="Calibri" pitchFamily="34" charset="-122"/>
@@ -5217,7 +5217,7 @@
             <a:r>
               <a:rPr lang="en-US" sz="1100" b="1" spc="100" kern="0" dirty="0">
                 <a:solidFill>
-                  <a:srgbClr val="C87F2A"/>
+                  <a:srgbClr val="3E6CA3"/>
                 </a:solidFill>
                 <a:latin typeface="Calibri" pitchFamily="34" charset="0"/>
                 <a:ea typeface="Calibri" pitchFamily="34" charset="-122"/>
@@ -5242,15 +5242,15 @@
           </a:xfrm>
           <a:prstGeom prst="roundRect">
             <a:avLst>
-              <a:gd name="adj" fmla="val 1829"/>
+              <a:gd name="adj" fmla="val 915"/>
             </a:avLst>
           </a:prstGeom>
           <a:solidFill>
-            <a:srgbClr val="F7F5F2"/>
+            <a:srgbClr val="F4F6F9"/>
           </a:solidFill>
           <a:ln w="12700">
             <a:solidFill>
-              <a:srgbClr val="F7F5F2"/>
+              <a:srgbClr val="F4F6F9"/>
             </a:solidFill>
             <a:prstDash val="solid"/>
           </a:ln>
@@ -5271,7 +5271,7 @@
             <a:avLst/>
           </a:prstGeom>
           <a:solidFill>
-            <a:srgbClr val="C87F2A"/>
+            <a:srgbClr val="3E6CA3"/>
           </a:solidFill>
           <a:ln/>
         </p:spPr>
@@ -5342,7 +5342,7 @@
             <a:r>
               <a:rPr lang="en-US" sz="1800" b="1" dirty="0">
                 <a:solidFill>
-                  <a:srgbClr val="2B2118"/>
+                  <a:srgbClr val="12294A"/>
                 </a:solidFill>
                 <a:latin typeface="Cambria" pitchFamily="34" charset="0"/>
                 <a:ea typeface="Cambria" pitchFamily="34" charset="-122"/>
@@ -5384,7 +5384,7 @@
             <a:r>
               <a:rPr lang="en-US" sz="1300" dirty="0">
                 <a:solidFill>
-                  <a:srgbClr val="6B6259"/>
+                  <a:srgbClr val="5A6472"/>
                 </a:solidFill>
                 <a:latin typeface="Calibri" pitchFamily="34" charset="0"/>
                 <a:ea typeface="Calibri" pitchFamily="34" charset="-122"/>
@@ -5404,7 +5404,7 @@
             <a:r>
               <a:rPr lang="en-US" sz="1300" dirty="0">
                 <a:solidFill>
-                  <a:srgbClr val="6B6259"/>
+                  <a:srgbClr val="5A6472"/>
                 </a:solidFill>
                 <a:latin typeface="Calibri" pitchFamily="34" charset="0"/>
                 <a:ea typeface="Calibri" pitchFamily="34" charset="-122"/>
@@ -5443,7 +5443,7 @@
             <a:r>
               <a:rPr lang="en-US" sz="1100" b="1" spc="100" kern="0" dirty="0">
                 <a:solidFill>
-                  <a:srgbClr val="C87F2A"/>
+                  <a:srgbClr val="3E6CA3"/>
                 </a:solidFill>
                 <a:latin typeface="Calibri" pitchFamily="34" charset="0"/>
                 <a:ea typeface="Calibri" pitchFamily="34" charset="-122"/>
@@ -5482,7 +5482,7 @@
             <a:r>
               <a:rPr lang="en-US" sz="1800" i="1" dirty="0">
                 <a:solidFill>
-                  <a:srgbClr val="2B2118"/>
+                  <a:srgbClr val="12294A"/>
                 </a:solidFill>
                 <a:latin typeface="Cambria" pitchFamily="34" charset="0"/>
                 <a:ea typeface="Cambria" pitchFamily="34" charset="-122"/>
@@ -5521,7 +5521,7 @@
             <a:r>
               <a:rPr lang="en-US" sz="900" dirty="0">
                 <a:solidFill>
-                  <a:srgbClr val="A79E93"/>
+                  <a:srgbClr val="98A2B0"/>
                 </a:solidFill>
                 <a:latin typeface="Calibri" pitchFamily="34" charset="0"/>
                 <a:ea typeface="Calibri" pitchFamily="34" charset="-122"/>
@@ -5560,7 +5560,7 @@
             <a:r>
               <a:rPr lang="en-US" sz="900" dirty="0">
                 <a:solidFill>
-                  <a:srgbClr val="A79E93"/>
+                  <a:srgbClr val="98A2B0"/>
                 </a:solidFill>
                 <a:latin typeface="Calibri" pitchFamily="34" charset="0"/>
                 <a:ea typeface="Calibri" pitchFamily="34" charset="-122"/>
@@ -5624,7 +5624,7 @@
             <a:r>
               <a:rPr lang="en-US" sz="3200" b="1" dirty="0">
                 <a:solidFill>
-                  <a:srgbClr val="2B2118"/>
+                  <a:srgbClr val="12294A"/>
                 </a:solidFill>
                 <a:latin typeface="Cambria" pitchFamily="34" charset="0"/>
                 <a:ea typeface="Cambria" pitchFamily="34" charset="-122"/>
@@ -5663,7 +5663,7 @@
             <a:r>
               <a:rPr lang="en-US" sz="1400" dirty="0">
                 <a:solidFill>
-                  <a:srgbClr val="6B6259"/>
+                  <a:srgbClr val="5A6472"/>
                 </a:solidFill>
                 <a:latin typeface="Calibri" pitchFamily="34" charset="0"/>
                 <a:ea typeface="Calibri" pitchFamily="34" charset="-122"/>
@@ -5702,7 +5702,7 @@
             <a:r>
               <a:rPr lang="en-US" sz="1400" dirty="0">
                 <a:solidFill>
-                  <a:srgbClr val="6B6259"/>
+                  <a:srgbClr val="5A6472"/>
                 </a:solidFill>
                 <a:latin typeface="Calibri" pitchFamily="34" charset="0"/>
                 <a:ea typeface="Calibri" pitchFamily="34" charset="-122"/>
@@ -5741,7 +5741,7 @@
             <a:r>
               <a:rPr lang="en-US" sz="1400" dirty="0">
                 <a:solidFill>
-                  <a:srgbClr val="2B2118"/>
+                  <a:srgbClr val="12294A"/>
                 </a:solidFill>
                 <a:latin typeface="Calibri" pitchFamily="34" charset="0"/>
                 <a:ea typeface="Calibri" pitchFamily="34" charset="-122"/>
@@ -5780,7 +5780,7 @@
             <a:r>
               <a:rPr lang="en-US" sz="1400" dirty="0">
                 <a:solidFill>
-                  <a:srgbClr val="6B6259"/>
+                  <a:srgbClr val="5A6472"/>
                 </a:solidFill>
                 <a:latin typeface="Calibri" pitchFamily="34" charset="0"/>
                 <a:ea typeface="Calibri" pitchFamily="34" charset="-122"/>
@@ -5819,7 +5819,7 @@
             <a:r>
               <a:rPr lang="en-US" sz="1400" dirty="0">
                 <a:solidFill>
-                  <a:srgbClr val="2B2118"/>
+                  <a:srgbClr val="12294A"/>
                 </a:solidFill>
                 <a:latin typeface="Calibri" pitchFamily="34" charset="0"/>
                 <a:ea typeface="Calibri" pitchFamily="34" charset="-122"/>
@@ -5858,7 +5858,7 @@
             <a:r>
               <a:rPr lang="en-US" sz="1400" dirty="0">
                 <a:solidFill>
-                  <a:srgbClr val="6B6259"/>
+                  <a:srgbClr val="5A6472"/>
                 </a:solidFill>
                 <a:latin typeface="Calibri" pitchFamily="34" charset="0"/>
                 <a:ea typeface="Calibri" pitchFamily="34" charset="-122"/>
@@ -5897,7 +5897,7 @@
             <a:r>
               <a:rPr lang="en-US" sz="1400" dirty="0">
                 <a:solidFill>
-                  <a:srgbClr val="2B2118"/>
+                  <a:srgbClr val="12294A"/>
                 </a:solidFill>
                 <a:latin typeface="Calibri" pitchFamily="34" charset="0"/>
                 <a:ea typeface="Calibri" pitchFamily="34" charset="-122"/>
@@ -5936,7 +5936,7 @@
             <a:r>
               <a:rPr lang="en-US" sz="1400" dirty="0">
                 <a:solidFill>
-                  <a:srgbClr val="6B6259"/>
+                  <a:srgbClr val="5A6472"/>
                 </a:solidFill>
                 <a:latin typeface="Calibri" pitchFamily="34" charset="0"/>
                 <a:ea typeface="Calibri" pitchFamily="34" charset="-122"/>
@@ -5975,7 +5975,7 @@
             <a:r>
               <a:rPr lang="en-US" sz="1400" dirty="0">
                 <a:solidFill>
-                  <a:srgbClr val="2B2118"/>
+                  <a:srgbClr val="12294A"/>
                 </a:solidFill>
                 <a:latin typeface="Calibri" pitchFamily="34" charset="0"/>
                 <a:ea typeface="Calibri" pitchFamily="34" charset="-122"/>
@@ -6014,7 +6014,7 @@
             <a:r>
               <a:rPr lang="en-US" sz="1400" dirty="0">
                 <a:solidFill>
-                  <a:srgbClr val="6B6259"/>
+                  <a:srgbClr val="5A6472"/>
                 </a:solidFill>
                 <a:latin typeface="Calibri" pitchFamily="34" charset="0"/>
                 <a:ea typeface="Calibri" pitchFamily="34" charset="-122"/>
@@ -6053,7 +6053,7 @@
             <a:r>
               <a:rPr lang="en-US" sz="1400" dirty="0">
                 <a:solidFill>
-                  <a:srgbClr val="2B2118"/>
+                  <a:srgbClr val="12294A"/>
                 </a:solidFill>
                 <a:latin typeface="Calibri" pitchFamily="34" charset="0"/>
                 <a:ea typeface="Calibri" pitchFamily="34" charset="-122"/>
@@ -6078,15 +6078,15 @@
           </a:xfrm>
           <a:prstGeom prst="roundRect">
             <a:avLst>
-              <a:gd name="adj" fmla="val 13043"/>
+              <a:gd name="adj" fmla="val 6522"/>
             </a:avLst>
           </a:prstGeom>
           <a:solidFill>
-            <a:srgbClr val="EFD9B8"/>
+            <a:srgbClr val="D6E2F0"/>
           </a:solidFill>
           <a:ln w="12700">
             <a:solidFill>
-              <a:srgbClr val="EFD9B8"/>
+              <a:srgbClr val="D6E2F0"/>
             </a:solidFill>
             <a:prstDash val="solid"/>
           </a:ln>
@@ -6119,7 +6119,7 @@
             <a:r>
               <a:rPr lang="en-US" sz="1400" b="1" dirty="0">
                 <a:solidFill>
-                  <a:srgbClr val="2B2118"/>
+                  <a:srgbClr val="12294A"/>
                 </a:solidFill>
                 <a:latin typeface="Calibri" pitchFamily="34" charset="0"/>
                 <a:ea typeface="Calibri" pitchFamily="34" charset="-122"/>
@@ -6158,7 +6158,7 @@
             <a:r>
               <a:rPr lang="en-US" sz="1400" b="1" dirty="0">
                 <a:solidFill>
-                  <a:srgbClr val="2B2118"/>
+                  <a:srgbClr val="12294A"/>
                 </a:solidFill>
                 <a:latin typeface="Calibri" pitchFamily="34" charset="0"/>
                 <a:ea typeface="Calibri" pitchFamily="34" charset="-122"/>
@@ -6183,15 +6183,15 @@
           </a:xfrm>
           <a:prstGeom prst="roundRect">
             <a:avLst>
-              <a:gd name="adj" fmla="val 2069"/>
+              <a:gd name="adj" fmla="val 1034"/>
             </a:avLst>
           </a:prstGeom>
           <a:solidFill>
-            <a:srgbClr val="2B2118"/>
+            <a:srgbClr val="12294A"/>
           </a:solidFill>
           <a:ln w="12700">
             <a:solidFill>
-              <a:srgbClr val="2B2118"/>
+              <a:srgbClr val="12294A"/>
             </a:solidFill>
             <a:prstDash val="solid"/>
           </a:ln>
@@ -6224,7 +6224,7 @@
             <a:r>
               <a:rPr lang="en-US" sz="1200" b="1" spc="300" kern="0" dirty="0">
                 <a:solidFill>
-                  <a:srgbClr val="C87F2A"/>
+                  <a:srgbClr val="8FB3DE"/>
                 </a:solidFill>
                 <a:latin typeface="Calibri" pitchFamily="34" charset="0"/>
                 <a:ea typeface="Calibri" pitchFamily="34" charset="-122"/>
@@ -6263,7 +6263,7 @@
             <a:r>
               <a:rPr lang="en-US" sz="6200" b="1" dirty="0">
                 <a:solidFill>
-                  <a:srgbClr val="FF7B6B"/>
+                  <a:srgbClr val="FF8A80"/>
                 </a:solidFill>
                 <a:latin typeface="Cambria" pitchFamily="34" charset="0"/>
                 <a:ea typeface="Cambria" pitchFamily="34" charset="-122"/>
@@ -6305,7 +6305,7 @@
             <a:r>
               <a:rPr lang="en-US" sz="1300" dirty="0">
                 <a:solidFill>
-                  <a:srgbClr val="EFD9B8"/>
+                  <a:srgbClr val="D6E2F0"/>
                 </a:solidFill>
                 <a:latin typeface="Calibri" pitchFamily="34" charset="0"/>
                 <a:ea typeface="Calibri" pitchFamily="34" charset="-122"/>
@@ -6325,7 +6325,7 @@
             <a:r>
               <a:rPr lang="en-US" sz="1300" dirty="0">
                 <a:solidFill>
-                  <a:srgbClr val="EFD9B8"/>
+                  <a:srgbClr val="D6E2F0"/>
                 </a:solidFill>
                 <a:latin typeface="Calibri" pitchFamily="34" charset="0"/>
                 <a:ea typeface="Calibri" pitchFamily="34" charset="-122"/>
@@ -6364,7 +6364,7 @@
             <a:r>
               <a:rPr lang="en-US" sz="1400" dirty="0">
                 <a:solidFill>
-                  <a:srgbClr val="6B6259"/>
+                  <a:srgbClr val="5A6472"/>
                 </a:solidFill>
                 <a:latin typeface="Calibri" pitchFamily="34" charset="0"/>
                 <a:ea typeface="Calibri" pitchFamily="34" charset="-122"/>
@@ -6403,7 +6403,7 @@
             <a:r>
               <a:rPr lang="en-US" sz="900" dirty="0">
                 <a:solidFill>
-                  <a:srgbClr val="A79E93"/>
+                  <a:srgbClr val="98A2B0"/>
                 </a:solidFill>
                 <a:latin typeface="Calibri" pitchFamily="34" charset="0"/>
                 <a:ea typeface="Calibri" pitchFamily="34" charset="-122"/>
@@ -6442,7 +6442,7 @@
             <a:r>
               <a:rPr lang="en-US" sz="900" dirty="0">
                 <a:solidFill>
-                  <a:srgbClr val="A79E93"/>
+                  <a:srgbClr val="98A2B0"/>
                 </a:solidFill>
                 <a:latin typeface="Calibri" pitchFamily="34" charset="0"/>
                 <a:ea typeface="Calibri" pitchFamily="34" charset="-122"/>
@@ -6506,7 +6506,7 @@
             <a:r>
               <a:rPr lang="en-US" sz="3200" b="1" dirty="0">
                 <a:solidFill>
-                  <a:srgbClr val="2B2118"/>
+                  <a:srgbClr val="12294A"/>
                 </a:solidFill>
                 <a:latin typeface="Cambria" pitchFamily="34" charset="0"/>
                 <a:ea typeface="Cambria" pitchFamily="34" charset="-122"/>
@@ -6545,7 +6545,7 @@
             <a:r>
               <a:rPr lang="en-US" sz="1400" dirty="0">
                 <a:solidFill>
-                  <a:srgbClr val="6B6259"/>
+                  <a:srgbClr val="5A6472"/>
                 </a:solidFill>
                 <a:latin typeface="Calibri" pitchFamily="34" charset="0"/>
                 <a:ea typeface="Calibri" pitchFamily="34" charset="-122"/>
@@ -6570,15 +6570,15 @@
           </a:xfrm>
           <a:prstGeom prst="roundRect">
             <a:avLst>
-              <a:gd name="adj" fmla="val 9677"/>
+              <a:gd name="adj" fmla="val 4839"/>
             </a:avLst>
           </a:prstGeom>
           <a:solidFill>
-            <a:srgbClr val="F7F5F2"/>
+            <a:srgbClr val="F4F6F9"/>
           </a:solidFill>
           <a:ln w="12700">
             <a:solidFill>
-              <a:srgbClr val="F7F5F2"/>
+              <a:srgbClr val="F4F6F9"/>
             </a:solidFill>
             <a:prstDash val="solid"/>
           </a:ln>
@@ -6611,7 +6611,7 @@
             <a:r>
               <a:rPr lang="en-US" sz="1400" b="1" dirty="0">
                 <a:solidFill>
-                  <a:srgbClr val="2B2118"/>
+                  <a:srgbClr val="12294A"/>
                 </a:solidFill>
                 <a:latin typeface="Calibri" pitchFamily="34" charset="0"/>
                 <a:ea typeface="Calibri" pitchFamily="34" charset="-122"/>
@@ -6650,7 +6650,7 @@
             <a:r>
               <a:rPr lang="en-US" sz="1100" dirty="0">
                 <a:solidFill>
-                  <a:srgbClr val="6B6259"/>
+                  <a:srgbClr val="5A6472"/>
                 </a:solidFill>
                 <a:latin typeface="Calibri" pitchFamily="34" charset="0"/>
                 <a:ea typeface="Calibri" pitchFamily="34" charset="-122"/>
@@ -6714,15 +6714,15 @@
           </a:xfrm>
           <a:prstGeom prst="roundRect">
             <a:avLst>
-              <a:gd name="adj" fmla="val 9677"/>
+              <a:gd name="adj" fmla="val 4839"/>
             </a:avLst>
           </a:prstGeom>
           <a:solidFill>
-            <a:srgbClr val="F7F5F2"/>
+            <a:srgbClr val="F4F6F9"/>
           </a:solidFill>
           <a:ln w="12700">
             <a:solidFill>
-              <a:srgbClr val="F7F5F2"/>
+              <a:srgbClr val="F4F6F9"/>
             </a:solidFill>
             <a:prstDash val="solid"/>
           </a:ln>
@@ -6755,7 +6755,7 @@
             <a:r>
               <a:rPr lang="en-US" sz="1400" b="1" dirty="0">
                 <a:solidFill>
-                  <a:srgbClr val="2B2118"/>
+                  <a:srgbClr val="12294A"/>
                 </a:solidFill>
                 <a:latin typeface="Calibri" pitchFamily="34" charset="0"/>
                 <a:ea typeface="Calibri" pitchFamily="34" charset="-122"/>
@@ -6794,7 +6794,7 @@
             <a:r>
               <a:rPr lang="en-US" sz="1100" dirty="0">
                 <a:solidFill>
-                  <a:srgbClr val="6B6259"/>
+                  <a:srgbClr val="5A6472"/>
                 </a:solidFill>
                 <a:latin typeface="Calibri" pitchFamily="34" charset="0"/>
                 <a:ea typeface="Calibri" pitchFamily="34" charset="-122"/>
@@ -6858,15 +6858,15 @@
           </a:xfrm>
           <a:prstGeom prst="roundRect">
             <a:avLst>
-              <a:gd name="adj" fmla="val 9677"/>
+              <a:gd name="adj" fmla="val 4839"/>
             </a:avLst>
           </a:prstGeom>
           <a:solidFill>
-            <a:srgbClr val="F7F5F2"/>
+            <a:srgbClr val="F4F6F9"/>
           </a:solidFill>
           <a:ln w="12700">
             <a:solidFill>
-              <a:srgbClr val="F7F5F2"/>
+              <a:srgbClr val="F4F6F9"/>
             </a:solidFill>
             <a:prstDash val="solid"/>
           </a:ln>
@@ -6899,7 +6899,7 @@
             <a:r>
               <a:rPr lang="en-US" sz="1400" b="1" dirty="0">
                 <a:solidFill>
-                  <a:srgbClr val="2B2118"/>
+                  <a:srgbClr val="12294A"/>
                 </a:solidFill>
                 <a:latin typeface="Calibri" pitchFamily="34" charset="0"/>
                 <a:ea typeface="Calibri" pitchFamily="34" charset="-122"/>
@@ -6938,7 +6938,7 @@
             <a:r>
               <a:rPr lang="en-US" sz="1100" dirty="0">
                 <a:solidFill>
-                  <a:srgbClr val="6B6259"/>
+                  <a:srgbClr val="5A6472"/>
                 </a:solidFill>
                 <a:latin typeface="Calibri" pitchFamily="34" charset="0"/>
                 <a:ea typeface="Calibri" pitchFamily="34" charset="-122"/>
@@ -7002,15 +7002,15 @@
           </a:xfrm>
           <a:prstGeom prst="roundRect">
             <a:avLst>
-              <a:gd name="adj" fmla="val 9677"/>
+              <a:gd name="adj" fmla="val 4839"/>
             </a:avLst>
           </a:prstGeom>
           <a:solidFill>
-            <a:srgbClr val="F7F5F2"/>
+            <a:srgbClr val="F4F6F9"/>
           </a:solidFill>
           <a:ln w="12700">
             <a:solidFill>
-              <a:srgbClr val="F7F5F2"/>
+              <a:srgbClr val="F4F6F9"/>
             </a:solidFill>
             <a:prstDash val="solid"/>
           </a:ln>
@@ -7043,7 +7043,7 @@
             <a:r>
               <a:rPr lang="en-US" sz="1400" b="1" dirty="0">
                 <a:solidFill>
-                  <a:srgbClr val="2B2118"/>
+                  <a:srgbClr val="12294A"/>
                 </a:solidFill>
                 <a:latin typeface="Calibri" pitchFamily="34" charset="0"/>
                 <a:ea typeface="Calibri" pitchFamily="34" charset="-122"/>
@@ -7082,7 +7082,7 @@
             <a:r>
               <a:rPr lang="en-US" sz="1100" dirty="0">
                 <a:solidFill>
-                  <a:srgbClr val="6B6259"/>
+                  <a:srgbClr val="5A6472"/>
                 </a:solidFill>
                 <a:latin typeface="Calibri" pitchFamily="34" charset="0"/>
                 <a:ea typeface="Calibri" pitchFamily="34" charset="-122"/>
@@ -7146,15 +7146,15 @@
           </a:xfrm>
           <a:prstGeom prst="roundRect">
             <a:avLst>
-              <a:gd name="adj" fmla="val 1807"/>
+              <a:gd name="adj" fmla="val 904"/>
             </a:avLst>
           </a:prstGeom>
           <a:solidFill>
-            <a:srgbClr val="2B2118"/>
+            <a:srgbClr val="12294A"/>
           </a:solidFill>
           <a:ln w="12700">
             <a:solidFill>
-              <a:srgbClr val="2B2118"/>
+              <a:srgbClr val="12294A"/>
             </a:solidFill>
             <a:prstDash val="solid"/>
           </a:ln>
@@ -7187,7 +7187,7 @@
             <a:r>
               <a:rPr lang="en-US" sz="1200" b="1" spc="300" kern="0" dirty="0">
                 <a:solidFill>
-                  <a:srgbClr val="C87F2A"/>
+                  <a:srgbClr val="8FB3DE"/>
                 </a:solidFill>
                 <a:latin typeface="Calibri" pitchFamily="34" charset="0"/>
                 <a:ea typeface="Calibri" pitchFamily="34" charset="-122"/>
@@ -7226,7 +7226,7 @@
             <a:r>
               <a:rPr lang="en-US" sz="4400" b="1" dirty="0">
                 <a:solidFill>
-                  <a:srgbClr val="FF7B6B"/>
+                  <a:srgbClr val="FF8A80"/>
                 </a:solidFill>
                 <a:latin typeface="Cambria" pitchFamily="34" charset="0"/>
                 <a:ea typeface="Cambria" pitchFamily="34" charset="-122"/>
@@ -7307,7 +7307,7 @@
             <a:r>
               <a:rPr lang="en-US" sz="1200" dirty="0">
                 <a:solidFill>
-                  <a:srgbClr val="EFD9B8"/>
+                  <a:srgbClr val="D6E2F0"/>
                 </a:solidFill>
                 <a:latin typeface="Calibri" pitchFamily="34" charset="0"/>
                 <a:ea typeface="Calibri" pitchFamily="34" charset="-122"/>
@@ -7327,7 +7327,7 @@
             <a:r>
               <a:rPr lang="en-US" sz="1200" dirty="0">
                 <a:solidFill>
-                  <a:srgbClr val="EFD9B8"/>
+                  <a:srgbClr val="D6E2F0"/>
                 </a:solidFill>
                 <a:latin typeface="Calibri" pitchFamily="34" charset="0"/>
                 <a:ea typeface="Calibri" pitchFamily="34" charset="-122"/>
@@ -7366,7 +7366,7 @@
             <a:r>
               <a:rPr lang="en-US" sz="1200" dirty="0">
                 <a:solidFill>
-                  <a:srgbClr val="EFD9B8"/>
+                  <a:srgbClr val="D6E2F0"/>
                 </a:solidFill>
                 <a:latin typeface="Calibri" pitchFamily="34" charset="0"/>
                 <a:ea typeface="Calibri" pitchFamily="34" charset="-122"/>
@@ -7405,7 +7405,7 @@
             <a:r>
               <a:rPr lang="en-US" sz="900" dirty="0">
                 <a:solidFill>
-                  <a:srgbClr val="A79E93"/>
+                  <a:srgbClr val="98A2B0"/>
                 </a:solidFill>
                 <a:latin typeface="Calibri" pitchFamily="34" charset="0"/>
                 <a:ea typeface="Calibri" pitchFamily="34" charset="-122"/>
@@ -7444,7 +7444,7 @@
             <a:r>
               <a:rPr lang="en-US" sz="900" dirty="0">
                 <a:solidFill>
-                  <a:srgbClr val="A79E93"/>
+                  <a:srgbClr val="98A2B0"/>
                 </a:solidFill>
                 <a:latin typeface="Calibri" pitchFamily="34" charset="0"/>
                 <a:ea typeface="Calibri" pitchFamily="34" charset="-122"/>
@@ -7508,7 +7508,7 @@
             <a:r>
               <a:rPr lang="en-US" sz="3200" b="1" dirty="0">
                 <a:solidFill>
-                  <a:srgbClr val="2B2118"/>
+                  <a:srgbClr val="12294A"/>
                 </a:solidFill>
                 <a:latin typeface="Cambria" pitchFamily="34" charset="0"/>
                 <a:ea typeface="Cambria" pitchFamily="34" charset="-122"/>
@@ -7547,7 +7547,7 @@
             <a:r>
               <a:rPr lang="en-US" sz="1400" dirty="0">
                 <a:solidFill>
-                  <a:srgbClr val="6B6259"/>
+                  <a:srgbClr val="5A6472"/>
                 </a:solidFill>
                 <a:latin typeface="Calibri" pitchFamily="34" charset="0"/>
                 <a:ea typeface="Calibri" pitchFamily="34" charset="-122"/>
@@ -7572,15 +7572,15 @@
           </a:xfrm>
           <a:prstGeom prst="roundRect">
             <a:avLst>
-              <a:gd name="adj" fmla="val 5882"/>
+              <a:gd name="adj" fmla="val 2941"/>
             </a:avLst>
           </a:prstGeom>
           <a:solidFill>
-            <a:srgbClr val="F7F5F2"/>
+            <a:srgbClr val="F4F6F9"/>
           </a:solidFill>
           <a:ln w="12700">
             <a:solidFill>
-              <a:srgbClr val="F7F5F2"/>
+              <a:srgbClr val="F4F6F9"/>
             </a:solidFill>
             <a:prstDash val="solid"/>
           </a:ln>
@@ -7601,7 +7601,7 @@
             <a:avLst/>
           </a:prstGeom>
           <a:solidFill>
-            <a:srgbClr val="C87F2A"/>
+            <a:srgbClr val="3E6CA3"/>
           </a:solidFill>
           <a:ln/>
         </p:spPr>
@@ -7672,7 +7672,7 @@
             <a:r>
               <a:rPr lang="en-US" sz="1900" b="1" dirty="0">
                 <a:solidFill>
-                  <a:srgbClr val="2B2118"/>
+                  <a:srgbClr val="12294A"/>
                 </a:solidFill>
                 <a:latin typeface="Cambria" pitchFamily="34" charset="0"/>
                 <a:ea typeface="Cambria" pitchFamily="34" charset="-122"/>
@@ -7711,7 +7711,7 @@
             <a:r>
               <a:rPr lang="en-US" sz="1300" dirty="0">
                 <a:solidFill>
-                  <a:srgbClr val="6B6259"/>
+                  <a:srgbClr val="5A6472"/>
                 </a:solidFill>
                 <a:latin typeface="Calibri" pitchFamily="34" charset="0"/>
                 <a:ea typeface="Calibri" pitchFamily="34" charset="-122"/>
@@ -7775,15 +7775,15 @@
           </a:xfrm>
           <a:prstGeom prst="roundRect">
             <a:avLst>
-              <a:gd name="adj" fmla="val 5882"/>
+              <a:gd name="adj" fmla="val 2941"/>
             </a:avLst>
           </a:prstGeom>
           <a:solidFill>
-            <a:srgbClr val="F7F5F2"/>
+            <a:srgbClr val="F4F6F9"/>
           </a:solidFill>
           <a:ln w="12700">
             <a:solidFill>
-              <a:srgbClr val="F7F5F2"/>
+              <a:srgbClr val="F4F6F9"/>
             </a:solidFill>
             <a:prstDash val="solid"/>
           </a:ln>
@@ -7804,7 +7804,7 @@
             <a:avLst/>
           </a:prstGeom>
           <a:solidFill>
-            <a:srgbClr val="C87F2A"/>
+            <a:srgbClr val="3E6CA3"/>
           </a:solidFill>
           <a:ln/>
         </p:spPr>
@@ -7875,7 +7875,7 @@
             <a:r>
               <a:rPr lang="en-US" sz="1900" b="1" dirty="0">
                 <a:solidFill>
-                  <a:srgbClr val="2B2118"/>
+                  <a:srgbClr val="12294A"/>
                 </a:solidFill>
                 <a:latin typeface="Cambria" pitchFamily="34" charset="0"/>
                 <a:ea typeface="Cambria" pitchFamily="34" charset="-122"/>
@@ -7914,7 +7914,7 @@
             <a:r>
               <a:rPr lang="en-US" sz="1300" dirty="0">
                 <a:solidFill>
-                  <a:srgbClr val="6B6259"/>
+                  <a:srgbClr val="5A6472"/>
                 </a:solidFill>
                 <a:latin typeface="Calibri" pitchFamily="34" charset="0"/>
                 <a:ea typeface="Calibri" pitchFamily="34" charset="-122"/>
@@ -7953,7 +7953,7 @@
             <a:r>
               <a:rPr lang="en-US" sz="1800" b="1" dirty="0">
                 <a:solidFill>
-                  <a:srgbClr val="6B6259"/>
+                  <a:srgbClr val="5A6472"/>
                 </a:solidFill>
                 <a:latin typeface="Calibri" pitchFamily="34" charset="0"/>
                 <a:ea typeface="Calibri" pitchFamily="34" charset="-122"/>
@@ -7978,15 +7978,15 @@
           </a:xfrm>
           <a:prstGeom prst="roundRect">
             <a:avLst>
-              <a:gd name="adj" fmla="val 5882"/>
+              <a:gd name="adj" fmla="val 2941"/>
             </a:avLst>
           </a:prstGeom>
           <a:solidFill>
-            <a:srgbClr val="F7F5F2"/>
+            <a:srgbClr val="F4F6F9"/>
           </a:solidFill>
           <a:ln w="12700">
             <a:solidFill>
-              <a:srgbClr val="F7F5F2"/>
+              <a:srgbClr val="F4F6F9"/>
             </a:solidFill>
             <a:prstDash val="solid"/>
           </a:ln>
@@ -8007,7 +8007,7 @@
             <a:avLst/>
           </a:prstGeom>
           <a:solidFill>
-            <a:srgbClr val="C87F2A"/>
+            <a:srgbClr val="3E6CA3"/>
           </a:solidFill>
           <a:ln/>
         </p:spPr>
@@ -8078,7 +8078,7 @@
             <a:r>
               <a:rPr lang="en-US" sz="1900" b="1" dirty="0">
                 <a:solidFill>
-                  <a:srgbClr val="2B2118"/>
+                  <a:srgbClr val="12294A"/>
                 </a:solidFill>
                 <a:latin typeface="Cambria" pitchFamily="34" charset="0"/>
                 <a:ea typeface="Cambria" pitchFamily="34" charset="-122"/>
@@ -8117,7 +8117,7 @@
             <a:r>
               <a:rPr lang="en-US" sz="1300" dirty="0">
                 <a:solidFill>
-                  <a:srgbClr val="6B6259"/>
+                  <a:srgbClr val="5A6472"/>
                 </a:solidFill>
                 <a:latin typeface="Calibri" pitchFamily="34" charset="0"/>
                 <a:ea typeface="Calibri" pitchFamily="34" charset="-122"/>
@@ -8156,7 +8156,7 @@
             <a:r>
               <a:rPr lang="en-US" sz="1800" b="1" dirty="0">
                 <a:solidFill>
-                  <a:srgbClr val="2E6F40"/>
+                  <a:srgbClr val="1E6B3A"/>
                 </a:solidFill>
                 <a:latin typeface="Calibri" pitchFamily="34" charset="0"/>
                 <a:ea typeface="Calibri" pitchFamily="34" charset="-122"/>
@@ -8181,15 +8181,15 @@
           </a:xfrm>
           <a:prstGeom prst="roundRect">
             <a:avLst>
-              <a:gd name="adj" fmla="val 5882"/>
+              <a:gd name="adj" fmla="val 2941"/>
             </a:avLst>
           </a:prstGeom>
           <a:solidFill>
-            <a:srgbClr val="EFD9B8"/>
+            <a:srgbClr val="D6E2F0"/>
           </a:solidFill>
           <a:ln w="12700">
             <a:solidFill>
-              <a:srgbClr val="EFD9B8"/>
+              <a:srgbClr val="D6E2F0"/>
             </a:solidFill>
             <a:prstDash val="solid"/>
           </a:ln>
@@ -8210,7 +8210,7 @@
             <a:avLst/>
           </a:prstGeom>
           <a:solidFill>
-            <a:srgbClr val="2B2118"/>
+            <a:srgbClr val="12294A"/>
           </a:solidFill>
           <a:ln/>
         </p:spPr>
@@ -8281,7 +8281,7 @@
             <a:r>
               <a:rPr lang="en-US" sz="1900" b="1" dirty="0">
                 <a:solidFill>
-                  <a:srgbClr val="2B2118"/>
+                  <a:srgbClr val="12294A"/>
                 </a:solidFill>
                 <a:latin typeface="Cambria" pitchFamily="34" charset="0"/>
                 <a:ea typeface="Cambria" pitchFamily="34" charset="-122"/>
@@ -8320,7 +8320,7 @@
             <a:r>
               <a:rPr lang="en-US" sz="1300" dirty="0">
                 <a:solidFill>
-                  <a:srgbClr val="6B6259"/>
+                  <a:srgbClr val="5A6472"/>
                 </a:solidFill>
                 <a:latin typeface="Calibri" pitchFamily="34" charset="0"/>
                 <a:ea typeface="Calibri" pitchFamily="34" charset="-122"/>
@@ -8359,7 +8359,7 @@
             <a:r>
               <a:rPr lang="en-US" sz="1800" b="1" dirty="0">
                 <a:solidFill>
-                  <a:srgbClr val="2E6F40"/>
+                  <a:srgbClr val="1E6B3A"/>
                 </a:solidFill>
                 <a:latin typeface="Calibri" pitchFamily="34" charset="0"/>
                 <a:ea typeface="Calibri" pitchFamily="34" charset="-122"/>
@@ -8398,7 +8398,7 @@
             <a:r>
               <a:rPr lang="en-US" sz="900" dirty="0">
                 <a:solidFill>
-                  <a:srgbClr val="A79E93"/>
+                  <a:srgbClr val="98A2B0"/>
                 </a:solidFill>
                 <a:latin typeface="Calibri" pitchFamily="34" charset="0"/>
                 <a:ea typeface="Calibri" pitchFamily="34" charset="-122"/>
@@ -8437,7 +8437,7 @@
             <a:r>
               <a:rPr lang="en-US" sz="900" dirty="0">
                 <a:solidFill>
-                  <a:srgbClr val="A79E93"/>
+                  <a:srgbClr val="98A2B0"/>
                 </a:solidFill>
                 <a:latin typeface="Calibri" pitchFamily="34" charset="0"/>
                 <a:ea typeface="Calibri" pitchFamily="34" charset="-122"/>
@@ -8501,7 +8501,7 @@
             <a:r>
               <a:rPr lang="en-US" sz="3200" b="1" dirty="0">
                 <a:solidFill>
-                  <a:srgbClr val="2B2118"/>
+                  <a:srgbClr val="12294A"/>
                 </a:solidFill>
                 <a:latin typeface="Cambria" pitchFamily="34" charset="0"/>
                 <a:ea typeface="Cambria" pitchFamily="34" charset="-122"/>
@@ -8540,7 +8540,7 @@
             <a:r>
               <a:rPr lang="en-US" sz="1400" dirty="0">
                 <a:solidFill>
-                  <a:srgbClr val="6B6259"/>
+                  <a:srgbClr val="5A6472"/>
                 </a:solidFill>
                 <a:latin typeface="Calibri" pitchFamily="34" charset="0"/>
                 <a:ea typeface="Calibri" pitchFamily="34" charset="-122"/>
@@ -8565,15 +8565,15 @@
           </a:xfrm>
           <a:prstGeom prst="roundRect">
             <a:avLst>
-              <a:gd name="adj" fmla="val 1690"/>
+              <a:gd name="adj" fmla="val 845"/>
             </a:avLst>
           </a:prstGeom>
           <a:solidFill>
-            <a:srgbClr val="2B2118"/>
+            <a:srgbClr val="12294A"/>
           </a:solidFill>
           <a:ln w="12700">
             <a:solidFill>
-              <a:srgbClr val="2B2118"/>
+              <a:srgbClr val="12294A"/>
             </a:solidFill>
             <a:prstDash val="solid"/>
           </a:ln>
@@ -8594,7 +8594,7 @@
             <a:avLst/>
           </a:prstGeom>
           <a:solidFill>
-            <a:srgbClr val="C87F2A"/>
+            <a:srgbClr val="3E6CA3"/>
           </a:solidFill>
           <a:ln/>
         </p:spPr>
@@ -8708,7 +8708,7 @@
             <a:r>
               <a:rPr lang="en-US" sz="1250" dirty="0">
                 <a:solidFill>
-                  <a:srgbClr val="EFD9B8"/>
+                  <a:srgbClr val="D6E2F0"/>
                 </a:solidFill>
                 <a:latin typeface="Calibri" pitchFamily="34" charset="0"/>
                 <a:ea typeface="Calibri" pitchFamily="34" charset="-122"/>
@@ -8729,7 +8729,7 @@
             <a:r>
               <a:rPr lang="en-US" sz="1250" dirty="0">
                 <a:solidFill>
-                  <a:srgbClr val="EFD9B8"/>
+                  <a:srgbClr val="D6E2F0"/>
                 </a:solidFill>
                 <a:latin typeface="Calibri" pitchFamily="34" charset="0"/>
                 <a:ea typeface="Calibri" pitchFamily="34" charset="-122"/>
@@ -8750,7 +8750,7 @@
             <a:r>
               <a:rPr lang="en-US" sz="1250" dirty="0">
                 <a:solidFill>
-                  <a:srgbClr val="EFD9B8"/>
+                  <a:srgbClr val="D6E2F0"/>
                 </a:solidFill>
                 <a:latin typeface="Calibri" pitchFamily="34" charset="0"/>
                 <a:ea typeface="Calibri" pitchFamily="34" charset="-122"/>
@@ -8775,15 +8775,15 @@
           </a:xfrm>
           <a:prstGeom prst="roundRect">
             <a:avLst>
-              <a:gd name="adj" fmla="val 1690"/>
+              <a:gd name="adj" fmla="val 845"/>
             </a:avLst>
           </a:prstGeom>
           <a:solidFill>
-            <a:srgbClr val="F7F5F2"/>
+            <a:srgbClr val="F4F6F9"/>
           </a:solidFill>
           <a:ln w="12700">
             <a:solidFill>
-              <a:srgbClr val="F7F5F2"/>
+              <a:srgbClr val="F4F6F9"/>
             </a:solidFill>
             <a:prstDash val="solid"/>
           </a:ln>
@@ -8804,7 +8804,7 @@
             <a:avLst/>
           </a:prstGeom>
           <a:solidFill>
-            <a:srgbClr val="C87F2A"/>
+            <a:srgbClr val="3E6CA3"/>
           </a:solidFill>
           <a:ln/>
         </p:spPr>
@@ -8875,7 +8875,7 @@
             <a:r>
               <a:rPr lang="en-US" sz="1800" b="1" dirty="0">
                 <a:solidFill>
-                  <a:srgbClr val="2B2118"/>
+                  <a:srgbClr val="12294A"/>
                 </a:solidFill>
                 <a:latin typeface="Cambria" pitchFamily="34" charset="0"/>
                 <a:ea typeface="Cambria" pitchFamily="34" charset="-122"/>
@@ -8918,7 +8918,7 @@
             <a:r>
               <a:rPr lang="en-US" sz="1250" dirty="0">
                 <a:solidFill>
-                  <a:srgbClr val="6B6259"/>
+                  <a:srgbClr val="5A6472"/>
                 </a:solidFill>
                 <a:latin typeface="Calibri" pitchFamily="34" charset="0"/>
                 <a:ea typeface="Calibri" pitchFamily="34" charset="-122"/>
@@ -8939,7 +8939,7 @@
             <a:r>
               <a:rPr lang="en-US" sz="1250" dirty="0">
                 <a:solidFill>
-                  <a:srgbClr val="6B6259"/>
+                  <a:srgbClr val="5A6472"/>
                 </a:solidFill>
                 <a:latin typeface="Calibri" pitchFamily="34" charset="0"/>
                 <a:ea typeface="Calibri" pitchFamily="34" charset="-122"/>
@@ -8960,7 +8960,7 @@
             <a:r>
               <a:rPr lang="en-US" sz="1250" dirty="0">
                 <a:solidFill>
-                  <a:srgbClr val="6B6259"/>
+                  <a:srgbClr val="5A6472"/>
                 </a:solidFill>
                 <a:latin typeface="Calibri" pitchFamily="34" charset="0"/>
                 <a:ea typeface="Calibri" pitchFamily="34" charset="-122"/>
@@ -8985,15 +8985,15 @@
           </a:xfrm>
           <a:prstGeom prst="roundRect">
             <a:avLst>
-              <a:gd name="adj" fmla="val 1690"/>
+              <a:gd name="adj" fmla="val 845"/>
             </a:avLst>
           </a:prstGeom>
           <a:solidFill>
-            <a:srgbClr val="F7F5F2"/>
+            <a:srgbClr val="F4F6F9"/>
           </a:solidFill>
           <a:ln w="12700">
             <a:solidFill>
-              <a:srgbClr val="F7F5F2"/>
+              <a:srgbClr val="F4F6F9"/>
             </a:solidFill>
             <a:prstDash val="solid"/>
           </a:ln>
@@ -9014,7 +9014,7 @@
             <a:avLst/>
           </a:prstGeom>
           <a:solidFill>
-            <a:srgbClr val="C87F2A"/>
+            <a:srgbClr val="3E6CA3"/>
           </a:solidFill>
           <a:ln/>
         </p:spPr>
@@ -9085,7 +9085,7 @@
             <a:r>
               <a:rPr lang="en-US" sz="1800" b="1" dirty="0">
                 <a:solidFill>
-                  <a:srgbClr val="2B2118"/>
+                  <a:srgbClr val="12294A"/>
                 </a:solidFill>
                 <a:latin typeface="Cambria" pitchFamily="34" charset="0"/>
                 <a:ea typeface="Cambria" pitchFamily="34" charset="-122"/>
@@ -9128,7 +9128,7 @@
             <a:r>
               <a:rPr lang="en-US" sz="1250" dirty="0">
                 <a:solidFill>
-                  <a:srgbClr val="6B6259"/>
+                  <a:srgbClr val="5A6472"/>
                 </a:solidFill>
                 <a:latin typeface="Calibri" pitchFamily="34" charset="0"/>
                 <a:ea typeface="Calibri" pitchFamily="34" charset="-122"/>
@@ -9149,7 +9149,7 @@
             <a:r>
               <a:rPr lang="en-US" sz="1250" dirty="0">
                 <a:solidFill>
-                  <a:srgbClr val="6B6259"/>
+                  <a:srgbClr val="5A6472"/>
                 </a:solidFill>
                 <a:latin typeface="Calibri" pitchFamily="34" charset="0"/>
                 <a:ea typeface="Calibri" pitchFamily="34" charset="-122"/>
@@ -9170,7 +9170,7 @@
             <a:r>
               <a:rPr lang="en-US" sz="1250" dirty="0">
                 <a:solidFill>
-                  <a:srgbClr val="6B6259"/>
+                  <a:srgbClr val="5A6472"/>
                 </a:solidFill>
                 <a:latin typeface="Calibri" pitchFamily="34" charset="0"/>
                 <a:ea typeface="Calibri" pitchFamily="34" charset="-122"/>
@@ -9209,7 +9209,7 @@
             <a:r>
               <a:rPr lang="en-US" sz="900" dirty="0">
                 <a:solidFill>
-                  <a:srgbClr val="A79E93"/>
+                  <a:srgbClr val="98A2B0"/>
                 </a:solidFill>
                 <a:latin typeface="Calibri" pitchFamily="34" charset="0"/>
                 <a:ea typeface="Calibri" pitchFamily="34" charset="-122"/>
@@ -9248,7 +9248,7 @@
             <a:r>
               <a:rPr lang="en-US" sz="900" dirty="0">
                 <a:solidFill>
-                  <a:srgbClr val="A79E93"/>
+                  <a:srgbClr val="98A2B0"/>
                 </a:solidFill>
                 <a:latin typeface="Calibri" pitchFamily="34" charset="0"/>
                 <a:ea typeface="Calibri" pitchFamily="34" charset="-122"/>
@@ -9312,7 +9312,7 @@
             <a:r>
               <a:rPr lang="en-US" sz="3200" b="1" dirty="0">
                 <a:solidFill>
-                  <a:srgbClr val="2B2118"/>
+                  <a:srgbClr val="12294A"/>
                 </a:solidFill>
                 <a:latin typeface="Cambria" pitchFamily="34" charset="0"/>
                 <a:ea typeface="Cambria" pitchFamily="34" charset="-122"/>
@@ -9351,7 +9351,7 @@
             <a:r>
               <a:rPr lang="en-US" sz="1400" dirty="0">
                 <a:solidFill>
-                  <a:srgbClr val="6B6259"/>
+                  <a:srgbClr val="5A6472"/>
                 </a:solidFill>
                 <a:latin typeface="Calibri" pitchFamily="34" charset="0"/>
                 <a:ea typeface="Calibri" pitchFamily="34" charset="-122"/>
@@ -9376,15 +9376,15 @@
           </a:xfrm>
           <a:prstGeom prst="roundRect">
             <a:avLst>
-              <a:gd name="adj" fmla="val 4918"/>
+              <a:gd name="adj" fmla="val 2459"/>
             </a:avLst>
           </a:prstGeom>
           <a:solidFill>
-            <a:srgbClr val="F7F5F2"/>
+            <a:srgbClr val="F4F6F9"/>
           </a:solidFill>
           <a:ln w="12700">
             <a:solidFill>
-              <a:srgbClr val="F7F5F2"/>
+              <a:srgbClr val="F4F6F9"/>
             </a:solidFill>
             <a:prstDash val="solid"/>
           </a:ln>
@@ -9405,7 +9405,7 @@
             <a:avLst/>
           </a:prstGeom>
           <a:solidFill>
-            <a:srgbClr val="6B6259"/>
+            <a:srgbClr val="5A6472"/>
           </a:solidFill>
           <a:ln/>
         </p:spPr>
@@ -9476,7 +9476,7 @@
             <a:r>
               <a:rPr lang="en-US" sz="1800" b="1" dirty="0">
                 <a:solidFill>
-                  <a:srgbClr val="2B2118"/>
+                  <a:srgbClr val="12294A"/>
                 </a:solidFill>
                 <a:latin typeface="Cambria" pitchFamily="34" charset="0"/>
                 <a:ea typeface="Cambria" pitchFamily="34" charset="-122"/>
@@ -9518,7 +9518,7 @@
             <a:r>
               <a:rPr lang="en-US" sz="1300" dirty="0">
                 <a:solidFill>
-                  <a:srgbClr val="6B6259"/>
+                  <a:srgbClr val="5A6472"/>
                 </a:solidFill>
                 <a:latin typeface="Calibri" pitchFamily="34" charset="0"/>
                 <a:ea typeface="Calibri" pitchFamily="34" charset="-122"/>
@@ -9582,15 +9582,15 @@
           </a:xfrm>
           <a:prstGeom prst="roundRect">
             <a:avLst>
-              <a:gd name="adj" fmla="val 4918"/>
+              <a:gd name="adj" fmla="val 2459"/>
             </a:avLst>
           </a:prstGeom>
           <a:solidFill>
-            <a:srgbClr val="F7F5F2"/>
+            <a:srgbClr val="F4F6F9"/>
           </a:solidFill>
           <a:ln w="12700">
             <a:solidFill>
-              <a:srgbClr val="F7F5F2"/>
+              <a:srgbClr val="F4F6F9"/>
             </a:solidFill>
             <a:prstDash val="solid"/>
           </a:ln>
@@ -9611,7 +9611,7 @@
             <a:avLst/>
           </a:prstGeom>
           <a:solidFill>
-            <a:srgbClr val="6B6259"/>
+            <a:srgbClr val="5A6472"/>
           </a:solidFill>
           <a:ln/>
         </p:spPr>
@@ -9682,7 +9682,7 @@
             <a:r>
               <a:rPr lang="en-US" sz="1800" b="1" dirty="0">
                 <a:solidFill>
-                  <a:srgbClr val="2B2118"/>
+                  <a:srgbClr val="12294A"/>
                 </a:solidFill>
                 <a:latin typeface="Cambria" pitchFamily="34" charset="0"/>
                 <a:ea typeface="Cambria" pitchFamily="34" charset="-122"/>
@@ -9724,7 +9724,7 @@
             <a:r>
               <a:rPr lang="en-US" sz="1300" dirty="0">
                 <a:solidFill>
-                  <a:srgbClr val="6B6259"/>
+                  <a:srgbClr val="5A6472"/>
                 </a:solidFill>
                 <a:latin typeface="Calibri" pitchFamily="34" charset="0"/>
                 <a:ea typeface="Calibri" pitchFamily="34" charset="-122"/>
@@ -9763,7 +9763,7 @@
             <a:r>
               <a:rPr lang="en-US" sz="1700" b="1" dirty="0">
                 <a:solidFill>
-                  <a:srgbClr val="6B6259"/>
+                  <a:srgbClr val="5A6472"/>
                 </a:solidFill>
                 <a:latin typeface="Calibri" pitchFamily="34" charset="0"/>
                 <a:ea typeface="Calibri" pitchFamily="34" charset="-122"/>
@@ -9788,15 +9788,15 @@
           </a:xfrm>
           <a:prstGeom prst="roundRect">
             <a:avLst>
-              <a:gd name="adj" fmla="val 4918"/>
+              <a:gd name="adj" fmla="val 2459"/>
             </a:avLst>
           </a:prstGeom>
           <a:solidFill>
-            <a:srgbClr val="F7F5F2"/>
+            <a:srgbClr val="F4F6F9"/>
           </a:solidFill>
           <a:ln w="12700">
             <a:solidFill>
-              <a:srgbClr val="F7F5F2"/>
+              <a:srgbClr val="F4F6F9"/>
             </a:solidFill>
             <a:prstDash val="solid"/>
           </a:ln>
@@ -9817,7 +9817,7 @@
             <a:avLst/>
           </a:prstGeom>
           <a:solidFill>
-            <a:srgbClr val="6B6259"/>
+            <a:srgbClr val="5A6472"/>
           </a:solidFill>
           <a:ln/>
         </p:spPr>
@@ -9888,7 +9888,7 @@
             <a:r>
               <a:rPr lang="en-US" sz="1800" b="1" dirty="0">
                 <a:solidFill>
-                  <a:srgbClr val="2B2118"/>
+                  <a:srgbClr val="12294A"/>
                 </a:solidFill>
                 <a:latin typeface="Cambria" pitchFamily="34" charset="0"/>
                 <a:ea typeface="Cambria" pitchFamily="34" charset="-122"/>
@@ -9930,7 +9930,7 @@
             <a:r>
               <a:rPr lang="en-US" sz="1300" dirty="0">
                 <a:solidFill>
-                  <a:srgbClr val="6B6259"/>
+                  <a:srgbClr val="5A6472"/>
                 </a:solidFill>
                 <a:latin typeface="Calibri" pitchFamily="34" charset="0"/>
                 <a:ea typeface="Calibri" pitchFamily="34" charset="-122"/>
@@ -9969,7 +9969,7 @@
             <a:r>
               <a:rPr lang="en-US" sz="1700" b="1" dirty="0">
                 <a:solidFill>
-                  <a:srgbClr val="6B6259"/>
+                  <a:srgbClr val="5A6472"/>
                 </a:solidFill>
                 <a:latin typeface="Calibri" pitchFamily="34" charset="0"/>
                 <a:ea typeface="Calibri" pitchFamily="34" charset="-122"/>
@@ -10008,7 +10008,7 @@
             <a:r>
               <a:rPr lang="en-US" sz="900" dirty="0">
                 <a:solidFill>
-                  <a:srgbClr val="A79E93"/>
+                  <a:srgbClr val="98A2B0"/>
                 </a:solidFill>
                 <a:latin typeface="Calibri" pitchFamily="34" charset="0"/>
                 <a:ea typeface="Calibri" pitchFamily="34" charset="-122"/>
@@ -10047,7 +10047,7 @@
             <a:r>
               <a:rPr lang="en-US" sz="900" dirty="0">
                 <a:solidFill>
-                  <a:srgbClr val="A79E93"/>
+                  <a:srgbClr val="98A2B0"/>
                 </a:solidFill>
                 <a:latin typeface="Calibri" pitchFamily="34" charset="0"/>
                 <a:ea typeface="Calibri" pitchFamily="34" charset="-122"/>
@@ -10073,7 +10073,7 @@
     <p:bg>
       <p:bgPr>
         <a:solidFill>
-          <a:srgbClr val="2B2118"/>
+          <a:srgbClr val="12294A"/>
         </a:solidFill>
       </p:bgPr>
     </p:bg>
@@ -10118,7 +10118,7 @@
             <a:r>
               <a:rPr lang="en-US" sz="1300" b="1" spc="500" kern="0" dirty="0">
                 <a:solidFill>
-                  <a:srgbClr val="C87F2A"/>
+                  <a:srgbClr val="8FB3DE"/>
                 </a:solidFill>
                 <a:latin typeface="Calibri" pitchFamily="34" charset="0"/>
                 <a:ea typeface="Calibri" pitchFamily="34" charset="-122"/>
@@ -10196,7 +10196,7 @@
             <a:r>
               <a:rPr lang="en-US" sz="1100" b="1" spc="200" kern="0" dirty="0">
                 <a:solidFill>
-                  <a:srgbClr val="C87F2A"/>
+                  <a:srgbClr val="8FB3DE"/>
                 </a:solidFill>
                 <a:latin typeface="Calibri" pitchFamily="34" charset="0"/>
                 <a:ea typeface="Calibri" pitchFamily="34" charset="-122"/>
@@ -10235,7 +10235,7 @@
             <a:r>
               <a:rPr lang="en-US" sz="2200" strike="sngStrike" dirty="0">
                 <a:solidFill>
-                  <a:srgbClr val="8A8079"/>
+                  <a:srgbClr val="7C8899"/>
                 </a:solidFill>
                 <a:latin typeface="Cambria" pitchFamily="34" charset="0"/>
                 <a:ea typeface="Cambria" pitchFamily="34" charset="-122"/>
@@ -10274,7 +10274,7 @@
             <a:r>
               <a:rPr lang="en-US" sz="2000" dirty="0">
                 <a:solidFill>
-                  <a:srgbClr val="C87F2A"/>
+                  <a:srgbClr val="8FB3DE"/>
                 </a:solidFill>
                 <a:latin typeface="Calibri" pitchFamily="34" charset="0"/>
                 <a:ea typeface="Calibri" pitchFamily="34" charset="-122"/>
@@ -10352,7 +10352,7 @@
             <a:r>
               <a:rPr lang="en-US" sz="1100" b="1" spc="200" kern="0" dirty="0">
                 <a:solidFill>
-                  <a:srgbClr val="C87F2A"/>
+                  <a:srgbClr val="8FB3DE"/>
                 </a:solidFill>
                 <a:latin typeface="Calibri" pitchFamily="34" charset="0"/>
                 <a:ea typeface="Calibri" pitchFamily="34" charset="-122"/>
@@ -10391,7 +10391,7 @@
             <a:r>
               <a:rPr lang="en-US" sz="2200" strike="sngStrike" dirty="0">
                 <a:solidFill>
-                  <a:srgbClr val="8A8079"/>
+                  <a:srgbClr val="7C8899"/>
                 </a:solidFill>
                 <a:latin typeface="Cambria" pitchFamily="34" charset="0"/>
                 <a:ea typeface="Cambria" pitchFamily="34" charset="-122"/>
@@ -10430,7 +10430,7 @@
             <a:r>
               <a:rPr lang="en-US" sz="2000" dirty="0">
                 <a:solidFill>
-                  <a:srgbClr val="C87F2A"/>
+                  <a:srgbClr val="8FB3DE"/>
                 </a:solidFill>
                 <a:latin typeface="Calibri" pitchFamily="34" charset="0"/>
                 <a:ea typeface="Calibri" pitchFamily="34" charset="-122"/>
@@ -10508,7 +10508,7 @@
             <a:r>
               <a:rPr lang="en-US" sz="1100" b="1" spc="200" kern="0" dirty="0">
                 <a:solidFill>
-                  <a:srgbClr val="C87F2A"/>
+                  <a:srgbClr val="8FB3DE"/>
                 </a:solidFill>
                 <a:latin typeface="Calibri" pitchFamily="34" charset="0"/>
                 <a:ea typeface="Calibri" pitchFamily="34" charset="-122"/>
@@ -10547,7 +10547,7 @@
             <a:r>
               <a:rPr lang="en-US" sz="2200" strike="sngStrike" dirty="0">
                 <a:solidFill>
-                  <a:srgbClr val="8A8079"/>
+                  <a:srgbClr val="7C8899"/>
                 </a:solidFill>
                 <a:latin typeface="Cambria" pitchFamily="34" charset="0"/>
                 <a:ea typeface="Cambria" pitchFamily="34" charset="-122"/>
@@ -10586,7 +10586,7 @@
             <a:r>
               <a:rPr lang="en-US" sz="2000" dirty="0">
                 <a:solidFill>
-                  <a:srgbClr val="C87F2A"/>
+                  <a:srgbClr val="8FB3DE"/>
                 </a:solidFill>
                 <a:latin typeface="Calibri" pitchFamily="34" charset="0"/>
                 <a:ea typeface="Calibri" pitchFamily="34" charset="-122"/>
@@ -10667,7 +10667,7 @@
             <a:r>
               <a:rPr lang="en-US" sz="1500" dirty="0">
                 <a:solidFill>
-                  <a:srgbClr val="EFD9B8"/>
+                  <a:srgbClr val="D6E2F0"/>
                 </a:solidFill>
                 <a:latin typeface="Calibri" pitchFamily="34" charset="0"/>
                 <a:ea typeface="Calibri" pitchFamily="34" charset="-122"/>
@@ -10687,7 +10687,7 @@
             <a:r>
               <a:rPr lang="en-US" sz="1500" dirty="0">
                 <a:solidFill>
-                  <a:srgbClr val="EFD9B8"/>
+                  <a:srgbClr val="D6E2F0"/>
                 </a:solidFill>
                 <a:latin typeface="Calibri" pitchFamily="34" charset="0"/>
                 <a:ea typeface="Calibri" pitchFamily="34" charset="-122"/>
@@ -10751,7 +10751,7 @@
             <a:r>
               <a:rPr lang="en-US" sz="3200" b="1" dirty="0">
                 <a:solidFill>
-                  <a:srgbClr val="2B2118"/>
+                  <a:srgbClr val="12294A"/>
                 </a:solidFill>
                 <a:latin typeface="Cambria" pitchFamily="34" charset="0"/>
                 <a:ea typeface="Cambria" pitchFamily="34" charset="-122"/>
@@ -10790,7 +10790,7 @@
             <a:r>
               <a:rPr lang="en-US" sz="1400" dirty="0">
                 <a:solidFill>
-                  <a:srgbClr val="6B6259"/>
+                  <a:srgbClr val="5A6472"/>
                 </a:solidFill>
                 <a:latin typeface="Calibri" pitchFamily="34" charset="0"/>
                 <a:ea typeface="Calibri" pitchFamily="34" charset="-122"/>
@@ -10831,15 +10831,15 @@
           </a:xfrm>
           <a:prstGeom prst="roundRect">
             <a:avLst>
-              <a:gd name="adj" fmla="val 3871"/>
+              <a:gd name="adj" fmla="val 1935"/>
             </a:avLst>
           </a:prstGeom>
           <a:solidFill>
-            <a:srgbClr val="EFD9B8"/>
+            <a:srgbClr val="D6E2F0"/>
           </a:solidFill>
           <a:ln w="12700">
             <a:solidFill>
-              <a:srgbClr val="EFD9B8"/>
+              <a:srgbClr val="D6E2F0"/>
             </a:solidFill>
             <a:prstDash val="solid"/>
           </a:ln>
@@ -10872,7 +10872,7 @@
             <a:r>
               <a:rPr lang="en-US" sz="1100" b="1" spc="200" kern="0" dirty="0">
                 <a:solidFill>
-                  <a:srgbClr val="2B2118"/>
+                  <a:srgbClr val="12294A"/>
                 </a:solidFill>
                 <a:latin typeface="Calibri" pitchFamily="34" charset="0"/>
                 <a:ea typeface="Calibri" pitchFamily="34" charset="-122"/>
@@ -10911,7 +10911,7 @@
             <a:r>
               <a:rPr lang="en-US" sz="3400" b="1" dirty="0">
                 <a:solidFill>
-                  <a:srgbClr val="2B2118"/>
+                  <a:srgbClr val="12294A"/>
                 </a:solidFill>
                 <a:latin typeface="Cambria" pitchFamily="34" charset="0"/>
                 <a:ea typeface="Cambria" pitchFamily="34" charset="-122"/>
@@ -10938,7 +10938,7 @@
             <a:avLst/>
           </a:prstGeom>
           <a:solidFill>
-            <a:srgbClr val="C87F2A"/>
+            <a:srgbClr val="3E6CA3"/>
           </a:solidFill>
           <a:ln/>
         </p:spPr>
@@ -10970,7 +10970,7 @@
             <a:r>
               <a:rPr lang="en-US" sz="1300" b="1" dirty="0">
                 <a:solidFill>
-                  <a:srgbClr val="2B2118"/>
+                  <a:srgbClr val="12294A"/>
                 </a:solidFill>
                 <a:latin typeface="Calibri" pitchFamily="34" charset="0"/>
                 <a:ea typeface="Calibri" pitchFamily="34" charset="-122"/>
@@ -11009,7 +11009,7 @@
             <a:r>
               <a:rPr lang="en-US" sz="1200" dirty="0">
                 <a:solidFill>
-                  <a:srgbClr val="6B6259"/>
+                  <a:srgbClr val="5A6472"/>
                 </a:solidFill>
                 <a:latin typeface="Calibri" pitchFamily="34" charset="0"/>
                 <a:ea typeface="Calibri" pitchFamily="34" charset="-122"/>
@@ -11036,7 +11036,7 @@
             <a:avLst/>
           </a:prstGeom>
           <a:solidFill>
-            <a:srgbClr val="C87F2A"/>
+            <a:srgbClr val="3E6CA3"/>
           </a:solidFill>
           <a:ln/>
         </p:spPr>
@@ -11068,7 +11068,7 @@
             <a:r>
               <a:rPr lang="en-US" sz="1300" b="1" dirty="0">
                 <a:solidFill>
-                  <a:srgbClr val="2B2118"/>
+                  <a:srgbClr val="12294A"/>
                 </a:solidFill>
                 <a:latin typeface="Calibri" pitchFamily="34" charset="0"/>
                 <a:ea typeface="Calibri" pitchFamily="34" charset="-122"/>
@@ -11107,7 +11107,7 @@
             <a:r>
               <a:rPr lang="en-US" sz="1200" dirty="0">
                 <a:solidFill>
-                  <a:srgbClr val="6B6259"/>
+                  <a:srgbClr val="5A6472"/>
                 </a:solidFill>
                 <a:latin typeface="Calibri" pitchFamily="34" charset="0"/>
                 <a:ea typeface="Calibri" pitchFamily="34" charset="-122"/>
@@ -11134,7 +11134,7 @@
             <a:avLst/>
           </a:prstGeom>
           <a:solidFill>
-            <a:srgbClr val="C87F2A"/>
+            <a:srgbClr val="3E6CA3"/>
           </a:solidFill>
           <a:ln/>
         </p:spPr>
@@ -11166,7 +11166,7 @@
             <a:r>
               <a:rPr lang="en-US" sz="1300" b="1" dirty="0">
                 <a:solidFill>
-                  <a:srgbClr val="2B2118"/>
+                  <a:srgbClr val="12294A"/>
                 </a:solidFill>
                 <a:latin typeface="Calibri" pitchFamily="34" charset="0"/>
                 <a:ea typeface="Calibri" pitchFamily="34" charset="-122"/>
@@ -11205,7 +11205,7 @@
             <a:r>
               <a:rPr lang="en-US" sz="1200" dirty="0">
                 <a:solidFill>
-                  <a:srgbClr val="6B6259"/>
+                  <a:srgbClr val="5A6472"/>
                 </a:solidFill>
                 <a:latin typeface="Calibri" pitchFamily="34" charset="0"/>
                 <a:ea typeface="Calibri" pitchFamily="34" charset="-122"/>
@@ -11244,7 +11244,7 @@
             <a:r>
               <a:rPr lang="en-US" sz="900" dirty="0">
                 <a:solidFill>
-                  <a:srgbClr val="A79E93"/>
+                  <a:srgbClr val="98A2B0"/>
                 </a:solidFill>
                 <a:latin typeface="Calibri" pitchFamily="34" charset="0"/>
                 <a:ea typeface="Calibri" pitchFamily="34" charset="-122"/>
@@ -11283,7 +11283,7 @@
             <a:r>
               <a:rPr lang="en-US" sz="900" dirty="0">
                 <a:solidFill>
-                  <a:srgbClr val="A79E93"/>
+                  <a:srgbClr val="98A2B0"/>
                 </a:solidFill>
                 <a:latin typeface="Calibri" pitchFamily="34" charset="0"/>
                 <a:ea typeface="Calibri" pitchFamily="34" charset="-122"/>
